--- a/yaplan-pitch.pptx
+++ b/yaplan-pitch.pptx
@@ -3166,7 +3166,7 @@
           <a:p>
             <a:pPr algn="l"/>
             <a:r>
-              <a:rPr sz="2200" b="1" i="0">
+              <a:rPr sz="2500" b="1" i="0">
                 <a:solidFill>
                   <a:srgbClr val="1A1A1A"/>
                 </a:solidFill>
@@ -3287,7 +3287,7 @@
           <a:p>
             <a:pPr algn="ctr"/>
             <a:r>
-              <a:rPr sz="800" b="0" i="0">
+              <a:rPr sz="1100" b="0" i="0">
                 <a:solidFill>
                   <a:srgbClr val="FFFFFF"/>
                 </a:solidFill>
@@ -3322,7 +3322,7 @@
           <a:p>
             <a:pPr algn="r"/>
             <a:r>
-              <a:rPr sz="800" b="0" i="0">
+              <a:rPr sz="1100" b="0" i="0">
                 <a:solidFill>
                   <a:srgbClr val="888888"/>
                 </a:solidFill>
@@ -3357,7 +3357,7 @@
           <a:p>
             <a:pPr algn="r"/>
             <a:r>
-              <a:rPr sz="800" b="0" i="0">
+              <a:rPr sz="1100" b="0" i="0">
                 <a:solidFill>
                   <a:srgbClr val="888888"/>
                 </a:solidFill>
@@ -3693,7 +3693,7 @@
           <a:p>
             <a:pPr algn="l"/>
             <a:r>
-              <a:rPr sz="1200" b="1" i="0">
+              <a:rPr sz="1500" b="1" i="0">
                 <a:solidFill>
                   <a:srgbClr val="007A87"/>
                 </a:solidFill>
@@ -3771,7 +3771,7 @@
           <a:p>
             <a:pPr algn="l"/>
             <a:r>
-              <a:rPr sz="1100" b="0">
+              <a:rPr sz="1400" b="0">
                 <a:solidFill>
                   <a:srgbClr val="4D4D4D"/>
                 </a:solidFill>
@@ -3787,7 +3787,7 @@
               </a:spcBef>
             </a:pPr>
             <a:r>
-              <a:rPr sz="1100" b="0">
+              <a:rPr sz="1400" b="0">
                 <a:solidFill>
                   <a:srgbClr val="4D4D4D"/>
                 </a:solidFill>
@@ -3803,7 +3803,7 @@
               </a:spcBef>
             </a:pPr>
             <a:r>
-              <a:rPr sz="1100" b="0">
+              <a:rPr sz="1400" b="0">
                 <a:solidFill>
                   <a:srgbClr val="4D4D4D"/>
                 </a:solidFill>
@@ -3819,7 +3819,7 @@
               </a:spcBef>
             </a:pPr>
             <a:r>
-              <a:rPr sz="1100" b="0">
+              <a:rPr sz="1400" b="0">
                 <a:solidFill>
                   <a:srgbClr val="4D4D4D"/>
                 </a:solidFill>
@@ -3983,7 +3983,7 @@
           <a:p>
             <a:pPr algn="l"/>
             <a:r>
-              <a:rPr sz="1200" b="1" i="0">
+              <a:rPr sz="1500" b="1" i="0">
                 <a:solidFill>
                   <a:srgbClr val="E2231A"/>
                 </a:solidFill>
@@ -4061,7 +4061,7 @@
           <a:p>
             <a:pPr algn="l"/>
             <a:r>
-              <a:rPr sz="1100" b="0">
+              <a:rPr sz="1400" b="0">
                 <a:solidFill>
                   <a:srgbClr val="4D4D4D"/>
                 </a:solidFill>
@@ -4077,7 +4077,7 @@
               </a:spcBef>
             </a:pPr>
             <a:r>
-              <a:rPr sz="1100" b="0">
+              <a:rPr sz="1400" b="0">
                 <a:solidFill>
                   <a:srgbClr val="4D4D4D"/>
                 </a:solidFill>
@@ -4093,7 +4093,7 @@
               </a:spcBef>
             </a:pPr>
             <a:r>
-              <a:rPr sz="1100" b="0">
+              <a:rPr sz="1400" b="0">
                 <a:solidFill>
                   <a:srgbClr val="4D4D4D"/>
                 </a:solidFill>
@@ -4109,7 +4109,7 @@
               </a:spcBef>
             </a:pPr>
             <a:r>
-              <a:rPr sz="1100" b="0">
+              <a:rPr sz="1400" b="0">
                 <a:solidFill>
                   <a:srgbClr val="4D4D4D"/>
                 </a:solidFill>
@@ -4273,7 +4273,7 @@
           <a:p>
             <a:pPr algn="l"/>
             <a:r>
-              <a:rPr sz="1200" b="1" i="0">
+              <a:rPr sz="1500" b="1" i="0">
                 <a:solidFill>
                   <a:srgbClr val="2D9C65"/>
                 </a:solidFill>
@@ -4351,7 +4351,7 @@
           <a:p>
             <a:pPr algn="l"/>
             <a:r>
-              <a:rPr sz="1100" b="0">
+              <a:rPr sz="1400" b="0">
                 <a:solidFill>
                   <a:srgbClr val="4D4D4D"/>
                 </a:solidFill>
@@ -4367,7 +4367,7 @@
               </a:spcBef>
             </a:pPr>
             <a:r>
-              <a:rPr sz="1100" b="0">
+              <a:rPr sz="1400" b="0">
                 <a:solidFill>
                   <a:srgbClr val="4D4D4D"/>
                 </a:solidFill>
@@ -4383,7 +4383,7 @@
               </a:spcBef>
             </a:pPr>
             <a:r>
-              <a:rPr sz="1100" b="0">
+              <a:rPr sz="1400" b="0">
                 <a:solidFill>
                   <a:srgbClr val="4D4D4D"/>
                 </a:solidFill>
@@ -4399,7 +4399,7 @@
               </a:spcBef>
             </a:pPr>
             <a:r>
-              <a:rPr sz="1100" b="0">
+              <a:rPr sz="1400" b="0">
                 <a:solidFill>
                   <a:srgbClr val="4D4D4D"/>
                 </a:solidFill>
@@ -4415,7 +4415,7 @@
               </a:spcBef>
             </a:pPr>
             <a:r>
-              <a:rPr sz="1100" b="0">
+              <a:rPr sz="1400" b="0">
                 <a:solidFill>
                   <a:srgbClr val="4D4D4D"/>
                 </a:solidFill>
@@ -4536,7 +4536,7 @@
           <a:p>
             <a:pPr algn="ctr"/>
             <a:r>
-              <a:rPr sz="1000" b="0" i="0">
+              <a:rPr sz="1300" b="0" i="0">
                 <a:solidFill>
                   <a:srgbClr val="FFFFFF"/>
                 </a:solidFill>
@@ -4657,7 +4657,7 @@
           <a:p>
             <a:pPr algn="ctr"/>
             <a:r>
-              <a:rPr sz="1000" b="0" i="0">
+              <a:rPr sz="1300" b="0" i="0">
                 <a:solidFill>
                   <a:srgbClr val="FFFFFF"/>
                 </a:solidFill>
@@ -4778,7 +4778,7 @@
           <a:p>
             <a:pPr algn="ctr"/>
             <a:r>
-              <a:rPr sz="1000" b="0" i="0">
+              <a:rPr sz="1300" b="0" i="0">
                 <a:solidFill>
                   <a:srgbClr val="FFFFFF"/>
                 </a:solidFill>
@@ -4874,7 +4874,7 @@
           <a:p>
             <a:pPr algn="l"/>
             <a:r>
-              <a:rPr sz="2200" b="1" i="0">
+              <a:rPr sz="2500" b="1" i="0">
                 <a:solidFill>
                   <a:srgbClr val="1A1A1A"/>
                 </a:solidFill>
@@ -4995,7 +4995,7 @@
           <a:p>
             <a:pPr algn="ctr"/>
             <a:r>
-              <a:rPr sz="800" b="0" i="0">
+              <a:rPr sz="1100" b="0" i="0">
                 <a:solidFill>
                   <a:srgbClr val="FFFFFF"/>
                 </a:solidFill>
@@ -5030,7 +5030,7 @@
           <a:p>
             <a:pPr algn="r"/>
             <a:r>
-              <a:rPr sz="800" b="0" i="0">
+              <a:rPr sz="1100" b="0" i="0">
                 <a:solidFill>
                   <a:srgbClr val="888888"/>
                 </a:solidFill>
@@ -5065,7 +5065,7 @@
           <a:p>
             <a:pPr algn="r"/>
             <a:r>
-              <a:rPr sz="800" b="0" i="0">
+              <a:rPr sz="1100" b="0" i="0">
                 <a:solidFill>
                   <a:srgbClr val="888888"/>
                 </a:solidFill>
@@ -5186,7 +5186,7 @@
           <a:p>
             <a:pPr algn="l"/>
             <a:r>
-              <a:rPr sz="1200" b="1" i="0">
+              <a:rPr sz="1500" b="1" i="0">
                 <a:solidFill>
                   <a:srgbClr val="1A1A1A"/>
                 </a:solidFill>
@@ -5331,7 +5331,7 @@
           <a:p>
             <a:pPr algn="l"/>
             <a:r>
-              <a:rPr sz="1200" b="1" i="0">
+              <a:rPr sz="1500" b="1" i="0">
                 <a:solidFill>
                   <a:srgbClr val="1A1A1A"/>
                 </a:solidFill>
@@ -5494,7 +5494,7 @@
           <a:p>
             <a:pPr algn="l"/>
             <a:r>
-              <a:rPr sz="2200" b="1" i="0">
+              <a:rPr sz="2500" b="1" i="0">
                 <a:solidFill>
                   <a:srgbClr val="1A1A1A"/>
                 </a:solidFill>
@@ -5615,7 +5615,7 @@
           <a:p>
             <a:pPr algn="ctr"/>
             <a:r>
-              <a:rPr sz="800" b="0" i="0">
+              <a:rPr sz="1100" b="0" i="0">
                 <a:solidFill>
                   <a:srgbClr val="FFFFFF"/>
                 </a:solidFill>
@@ -5650,7 +5650,7 @@
           <a:p>
             <a:pPr algn="r"/>
             <a:r>
-              <a:rPr sz="800" b="0" i="0">
+              <a:rPr sz="1100" b="0" i="0">
                 <a:solidFill>
                   <a:srgbClr val="888888"/>
                 </a:solidFill>
@@ -5685,7 +5685,7 @@
           <a:p>
             <a:pPr algn="r"/>
             <a:r>
-              <a:rPr sz="800" b="0" i="0">
+              <a:rPr sz="1100" b="0" i="0">
                 <a:solidFill>
                   <a:srgbClr val="888888"/>
                 </a:solidFill>
@@ -5806,7 +5806,7 @@
           <a:p>
             <a:pPr algn="l"/>
             <a:r>
-              <a:rPr sz="1200" b="1" i="0">
+              <a:rPr sz="1500" b="1" i="0">
                 <a:solidFill>
                   <a:srgbClr val="1A1A1A"/>
                 </a:solidFill>
@@ -5951,7 +5951,7 @@
           <a:p>
             <a:pPr algn="l"/>
             <a:r>
-              <a:rPr sz="1200" b="1" i="0">
+              <a:rPr sz="1500" b="1" i="0">
                 <a:solidFill>
                   <a:srgbClr val="1A1A1A"/>
                 </a:solidFill>
@@ -6139,7 +6139,7 @@
           <a:p>
             <a:pPr algn="l"/>
             <a:r>
-              <a:rPr sz="1200" b="1" i="0">
+              <a:rPr sz="1500" b="1" i="0">
                 <a:solidFill>
                   <a:srgbClr val="1A1A1A"/>
                 </a:solidFill>
@@ -6217,7 +6217,7 @@
           <a:p>
             <a:pPr algn="l"/>
             <a:r>
-              <a:rPr sz="1050" b="0">
+              <a:rPr sz="1350" b="0">
                 <a:solidFill>
                   <a:srgbClr val="4D4D4D"/>
                 </a:solidFill>
@@ -6233,7 +6233,7 @@
               </a:spcBef>
             </a:pPr>
             <a:r>
-              <a:rPr sz="1050" b="0">
+              <a:rPr sz="1350" b="0">
                 <a:solidFill>
                   <a:srgbClr val="4D4D4D"/>
                 </a:solidFill>
@@ -6249,7 +6249,7 @@
               </a:spcBef>
             </a:pPr>
             <a:r>
-              <a:rPr sz="1050" b="0">
+              <a:rPr sz="1350" b="0">
                 <a:solidFill>
                   <a:srgbClr val="4D4D4D"/>
                 </a:solidFill>
@@ -6265,7 +6265,7 @@
               </a:spcBef>
             </a:pPr>
             <a:r>
-              <a:rPr sz="1050" b="0">
+              <a:rPr sz="1350" b="0">
                 <a:solidFill>
                   <a:srgbClr val="4D4D4D"/>
                 </a:solidFill>
@@ -6386,7 +6386,7 @@
           <a:p>
             <a:pPr algn="l"/>
             <a:r>
-              <a:rPr sz="1200" b="1" i="0">
+              <a:rPr sz="1500" b="1" i="0">
                 <a:solidFill>
                   <a:srgbClr val="1A1A1A"/>
                 </a:solidFill>
@@ -6464,7 +6464,7 @@
           <a:p>
             <a:pPr algn="l"/>
             <a:r>
-              <a:rPr sz="1050" b="0">
+              <a:rPr sz="1350" b="0">
                 <a:solidFill>
                   <a:srgbClr val="4D4D4D"/>
                 </a:solidFill>
@@ -6480,7 +6480,7 @@
               </a:spcBef>
             </a:pPr>
             <a:r>
-              <a:rPr sz="1050" b="0">
+              <a:rPr sz="1350" b="0">
                 <a:solidFill>
                   <a:srgbClr val="4D4D4D"/>
                 </a:solidFill>
@@ -6496,7 +6496,7 @@
               </a:spcBef>
             </a:pPr>
             <a:r>
-              <a:rPr sz="1050" b="0">
+              <a:rPr sz="1350" b="0">
                 <a:solidFill>
                   <a:srgbClr val="4D4D4D"/>
                 </a:solidFill>
@@ -6512,7 +6512,7 @@
               </a:spcBef>
             </a:pPr>
             <a:r>
-              <a:rPr sz="1050" b="0">
+              <a:rPr sz="1350" b="0">
                 <a:solidFill>
                   <a:srgbClr val="4D4D4D"/>
                 </a:solidFill>
@@ -6633,7 +6633,7 @@
           <a:p>
             <a:pPr algn="l"/>
             <a:r>
-              <a:rPr sz="1200" b="1" i="0">
+              <a:rPr sz="1500" b="1" i="0">
                 <a:solidFill>
                   <a:srgbClr val="1A1A1A"/>
                 </a:solidFill>
@@ -6711,7 +6711,7 @@
           <a:p>
             <a:pPr algn="l"/>
             <a:r>
-              <a:rPr sz="1050" b="0">
+              <a:rPr sz="1350" b="0">
                 <a:solidFill>
                   <a:srgbClr val="4D4D4D"/>
                 </a:solidFill>
@@ -6727,7 +6727,7 @@
               </a:spcBef>
             </a:pPr>
             <a:r>
-              <a:rPr sz="1050" b="0">
+              <a:rPr sz="1350" b="0">
                 <a:solidFill>
                   <a:srgbClr val="4D4D4D"/>
                 </a:solidFill>
@@ -6743,7 +6743,7 @@
               </a:spcBef>
             </a:pPr>
             <a:r>
-              <a:rPr sz="1050" b="0">
+              <a:rPr sz="1350" b="0">
                 <a:solidFill>
                   <a:srgbClr val="4D4D4D"/>
                 </a:solidFill>
@@ -6759,7 +6759,7 @@
               </a:spcBef>
             </a:pPr>
             <a:r>
-              <a:rPr sz="1050" b="0">
+              <a:rPr sz="1350" b="0">
                 <a:solidFill>
                   <a:srgbClr val="4D4D4D"/>
                 </a:solidFill>
@@ -6855,7 +6855,7 @@
           <a:p>
             <a:pPr algn="l"/>
             <a:r>
-              <a:rPr sz="2200" b="1" i="0">
+              <a:rPr sz="2500" b="1" i="0">
                 <a:solidFill>
                   <a:srgbClr val="1A1A1A"/>
                 </a:solidFill>
@@ -6933,7 +6933,7 @@
           <a:p>
             <a:pPr algn="r"/>
             <a:r>
-              <a:rPr sz="800" b="0" i="0">
+              <a:rPr sz="1100" b="0" i="0">
                 <a:solidFill>
                   <a:srgbClr val="888888"/>
                 </a:solidFill>
@@ -6968,7 +6968,7 @@
           <a:p>
             <a:pPr algn="r"/>
             <a:r>
-              <a:rPr sz="800" b="0" i="0">
+              <a:rPr sz="1100" b="0" i="0">
                 <a:solidFill>
                   <a:srgbClr val="888888"/>
                 </a:solidFill>
@@ -7390,7 +7390,7 @@
           <a:p>
             <a:pPr algn="l"/>
             <a:r>
-              <a:rPr sz="4000" b="1" i="0">
+              <a:rPr sz="4300" b="1" i="0">
                 <a:solidFill>
                   <a:srgbClr val="E2231A"/>
                 </a:solidFill>
@@ -7425,7 +7425,7 @@
           <a:p>
             <a:pPr algn="l"/>
             <a:r>
-              <a:rPr sz="1300" b="1" i="0">
+              <a:rPr sz="1600" b="1" i="0">
                 <a:solidFill>
                   <a:srgbClr val="1A1A1A"/>
                 </a:solidFill>
@@ -7503,7 +7503,7 @@
           <a:p>
             <a:pPr algn="l"/>
             <a:r>
-              <a:rPr sz="1100" b="0" i="0">
+              <a:rPr sz="1400" b="0" i="0">
                 <a:solidFill>
                   <a:srgbClr val="4D4D4D"/>
                 </a:solidFill>
@@ -7667,7 +7667,7 @@
           <a:p>
             <a:pPr algn="l"/>
             <a:r>
-              <a:rPr sz="4000" b="1" i="0">
+              <a:rPr sz="4300" b="1" i="0">
                 <a:solidFill>
                   <a:srgbClr val="D48B00"/>
                 </a:solidFill>
@@ -7702,7 +7702,7 @@
           <a:p>
             <a:pPr algn="l"/>
             <a:r>
-              <a:rPr sz="1300" b="1" i="0">
+              <a:rPr sz="1600" b="1" i="0">
                 <a:solidFill>
                   <a:srgbClr val="1A1A1A"/>
                 </a:solidFill>
@@ -7780,7 +7780,7 @@
           <a:p>
             <a:pPr algn="l"/>
             <a:r>
-              <a:rPr sz="1100" b="0" i="0">
+              <a:rPr sz="1400" b="0" i="0">
                 <a:solidFill>
                   <a:srgbClr val="4D4D4D"/>
                 </a:solidFill>
@@ -7944,7 +7944,7 @@
           <a:p>
             <a:pPr algn="l"/>
             <a:r>
-              <a:rPr sz="4000" b="1" i="0">
+              <a:rPr sz="4300" b="1" i="0">
                 <a:solidFill>
                   <a:srgbClr val="2D9C65"/>
                 </a:solidFill>
@@ -7979,7 +7979,7 @@
           <a:p>
             <a:pPr algn="l"/>
             <a:r>
-              <a:rPr sz="1300" b="1" i="0">
+              <a:rPr sz="1600" b="1" i="0">
                 <a:solidFill>
                   <a:srgbClr val="1A1A1A"/>
                 </a:solidFill>
@@ -8057,7 +8057,7 @@
           <a:p>
             <a:pPr algn="l"/>
             <a:r>
-              <a:rPr sz="1100" b="0" i="0">
+              <a:rPr sz="1400" b="0" i="0">
                 <a:solidFill>
                   <a:srgbClr val="4D4D4D"/>
                 </a:solidFill>
@@ -8178,7 +8178,7 @@
           <a:p>
             <a:pPr algn="ctr"/>
             <a:r>
-              <a:rPr sz="1200" b="1" i="0">
+              <a:rPr sz="1500" b="1" i="0">
                 <a:solidFill>
                   <a:srgbClr val="FFFFFF"/>
                 </a:solidFill>
@@ -8274,7 +8274,7 @@
           <a:p>
             <a:pPr algn="l"/>
             <a:r>
-              <a:rPr sz="2200" b="1" i="0">
+              <a:rPr sz="2500" b="1" i="0">
                 <a:solidFill>
                   <a:srgbClr val="1A1A1A"/>
                 </a:solidFill>
@@ -8395,7 +8395,7 @@
           <a:p>
             <a:pPr algn="ctr"/>
             <a:r>
-              <a:rPr sz="800" b="0" i="0">
+              <a:rPr sz="1100" b="0" i="0">
                 <a:solidFill>
                   <a:srgbClr val="FFFFFF"/>
                 </a:solidFill>
@@ -8430,7 +8430,7 @@
           <a:p>
             <a:pPr algn="r"/>
             <a:r>
-              <a:rPr sz="800" b="0" i="0">
+              <a:rPr sz="1100" b="0" i="0">
                 <a:solidFill>
                   <a:srgbClr val="888888"/>
                 </a:solidFill>
@@ -8465,7 +8465,7 @@
           <a:p>
             <a:pPr algn="r"/>
             <a:r>
-              <a:rPr sz="800" b="0" i="0">
+              <a:rPr sz="1100" b="0" i="0">
                 <a:solidFill>
                   <a:srgbClr val="888888"/>
                 </a:solidFill>
@@ -8543,7 +8543,7 @@
           <a:p>
             <a:pPr algn="ctr"/>
             <a:r>
-              <a:rPr sz="1400" b="1" i="0">
+              <a:rPr sz="1700" b="1" i="0">
                 <a:solidFill>
                   <a:srgbClr val="FFFFFF"/>
                 </a:solidFill>
@@ -8621,7 +8621,7 @@
           <a:p>
             <a:pPr algn="l"/>
             <a:r>
-              <a:rPr sz="1000" b="0" i="0">
+              <a:rPr sz="1300" b="0" i="0">
                 <a:solidFill>
                   <a:srgbClr val="888888"/>
                 </a:solidFill>
@@ -8699,7 +8699,7 @@
           <a:p>
             <a:pPr algn="l"/>
             <a:r>
-              <a:rPr sz="1000" b="1" i="0">
+              <a:rPr sz="1300" b="1" i="0">
                 <a:solidFill>
                   <a:srgbClr val="1A1A1A"/>
                 </a:solidFill>
@@ -8734,7 +8734,7 @@
           <a:p>
             <a:pPr algn="l"/>
             <a:r>
-              <a:rPr sz="1050" b="0">
+              <a:rPr sz="1350" b="0">
                 <a:solidFill>
                   <a:srgbClr val="4D4D4D"/>
                 </a:solidFill>
@@ -8750,7 +8750,7 @@
               </a:spcBef>
             </a:pPr>
             <a:r>
-              <a:rPr sz="1050" b="0">
+              <a:rPr sz="1350" b="0">
                 <a:solidFill>
                   <a:srgbClr val="4D4D4D"/>
                 </a:solidFill>
@@ -8766,7 +8766,7 @@
               </a:spcBef>
             </a:pPr>
             <a:r>
-              <a:rPr sz="1050" b="0">
+              <a:rPr sz="1350" b="0">
                 <a:solidFill>
                   <a:srgbClr val="4D4D4D"/>
                 </a:solidFill>
@@ -8844,7 +8844,7 @@
           <a:p>
             <a:pPr algn="l"/>
             <a:r>
-              <a:rPr sz="900" b="0" i="0">
+              <a:rPr sz="1200" b="0" i="0">
                 <a:solidFill>
                   <a:srgbClr val="888888"/>
                 </a:solidFill>
@@ -8879,7 +8879,7 @@
           <a:p>
             <a:pPr algn="l"/>
             <a:r>
-              <a:rPr sz="3600" b="1" i="0">
+              <a:rPr sz="3900" b="1" i="0">
                 <a:solidFill>
                   <a:srgbClr val="007A87"/>
                 </a:solidFill>
@@ -9000,7 +9000,7 @@
           <a:p>
             <a:pPr algn="ctr"/>
             <a:r>
-              <a:rPr sz="1400" b="1" i="0">
+              <a:rPr sz="1700" b="1" i="0">
                 <a:solidFill>
                   <a:srgbClr val="FFFFFF"/>
                 </a:solidFill>
@@ -9078,7 +9078,7 @@
           <a:p>
             <a:pPr algn="l"/>
             <a:r>
-              <a:rPr sz="1000" b="0" i="0">
+              <a:rPr sz="1300" b="0" i="0">
                 <a:solidFill>
                   <a:srgbClr val="888888"/>
                 </a:solidFill>
@@ -9156,7 +9156,7 @@
           <a:p>
             <a:pPr algn="l"/>
             <a:r>
-              <a:rPr sz="1000" b="1" i="0">
+              <a:rPr sz="1300" b="1" i="0">
                 <a:solidFill>
                   <a:srgbClr val="1A1A1A"/>
                 </a:solidFill>
@@ -9191,7 +9191,7 @@
           <a:p>
             <a:pPr algn="l"/>
             <a:r>
-              <a:rPr sz="1050" b="0">
+              <a:rPr sz="1350" b="0">
                 <a:solidFill>
                   <a:srgbClr val="4D4D4D"/>
                 </a:solidFill>
@@ -9207,7 +9207,7 @@
               </a:spcBef>
             </a:pPr>
             <a:r>
-              <a:rPr sz="1050" b="0">
+              <a:rPr sz="1350" b="0">
                 <a:solidFill>
                   <a:srgbClr val="4D4D4D"/>
                 </a:solidFill>
@@ -9223,7 +9223,7 @@
               </a:spcBef>
             </a:pPr>
             <a:r>
-              <a:rPr sz="1050" b="0">
+              <a:rPr sz="1350" b="0">
                 <a:solidFill>
                   <a:srgbClr val="4D4D4D"/>
                 </a:solidFill>
@@ -9301,7 +9301,7 @@
           <a:p>
             <a:pPr algn="l"/>
             <a:r>
-              <a:rPr sz="900" b="0" i="0">
+              <a:rPr sz="1200" b="0" i="0">
                 <a:solidFill>
                   <a:srgbClr val="888888"/>
                 </a:solidFill>
@@ -9336,7 +9336,7 @@
           <a:p>
             <a:pPr algn="l"/>
             <a:r>
-              <a:rPr sz="3600" b="1" i="0">
+              <a:rPr sz="3900" b="1" i="0">
                 <a:solidFill>
                   <a:srgbClr val="E2231A"/>
                 </a:solidFill>
@@ -9457,7 +9457,7 @@
           <a:p>
             <a:pPr algn="ctr"/>
             <a:r>
-              <a:rPr sz="1400" b="1" i="0">
+              <a:rPr sz="1700" b="1" i="0">
                 <a:solidFill>
                   <a:srgbClr val="FFFFFF"/>
                 </a:solidFill>
@@ -9535,7 +9535,7 @@
           <a:p>
             <a:pPr algn="l"/>
             <a:r>
-              <a:rPr sz="1000" b="0" i="0">
+              <a:rPr sz="1300" b="0" i="0">
                 <a:solidFill>
                   <a:srgbClr val="888888"/>
                 </a:solidFill>
@@ -9613,7 +9613,7 @@
           <a:p>
             <a:pPr algn="l"/>
             <a:r>
-              <a:rPr sz="1000" b="1" i="0">
+              <a:rPr sz="1300" b="1" i="0">
                 <a:solidFill>
                   <a:srgbClr val="1A1A1A"/>
                 </a:solidFill>
@@ -9648,7 +9648,7 @@
           <a:p>
             <a:pPr algn="l"/>
             <a:r>
-              <a:rPr sz="1050" b="0">
+              <a:rPr sz="1350" b="0">
                 <a:solidFill>
                   <a:srgbClr val="4D4D4D"/>
                 </a:solidFill>
@@ -9664,7 +9664,7 @@
               </a:spcBef>
             </a:pPr>
             <a:r>
-              <a:rPr sz="1050" b="0">
+              <a:rPr sz="1350" b="0">
                 <a:solidFill>
                   <a:srgbClr val="4D4D4D"/>
                 </a:solidFill>
@@ -9680,7 +9680,7 @@
               </a:spcBef>
             </a:pPr>
             <a:r>
-              <a:rPr sz="1050" b="0">
+              <a:rPr sz="1350" b="0">
                 <a:solidFill>
                   <a:srgbClr val="4D4D4D"/>
                 </a:solidFill>
@@ -9758,7 +9758,7 @@
           <a:p>
             <a:pPr algn="l"/>
             <a:r>
-              <a:rPr sz="900" b="0" i="0">
+              <a:rPr sz="1200" b="0" i="0">
                 <a:solidFill>
                   <a:srgbClr val="888888"/>
                 </a:solidFill>
@@ -9793,7 +9793,7 @@
           <a:p>
             <a:pPr algn="l"/>
             <a:r>
-              <a:rPr sz="3600" b="1" i="0">
+              <a:rPr sz="3900" b="1" i="0">
                 <a:solidFill>
                   <a:srgbClr val="D48B00"/>
                 </a:solidFill>
@@ -9889,7 +9889,7 @@
           <a:p>
             <a:pPr algn="l"/>
             <a:r>
-              <a:rPr sz="2200" b="1" i="0">
+              <a:rPr sz="2500" b="1" i="0">
                 <a:solidFill>
                   <a:srgbClr val="1A1A1A"/>
                 </a:solidFill>
@@ -10010,7 +10010,7 @@
           <a:p>
             <a:pPr algn="ctr"/>
             <a:r>
-              <a:rPr sz="800" b="0" i="0">
+              <a:rPr sz="1100" b="0" i="0">
                 <a:solidFill>
                   <a:srgbClr val="FFFFFF"/>
                 </a:solidFill>
@@ -10045,7 +10045,7 @@
           <a:p>
             <a:pPr algn="r"/>
             <a:r>
-              <a:rPr sz="800" b="0" i="0">
+              <a:rPr sz="1100" b="0" i="0">
                 <a:solidFill>
                   <a:srgbClr val="888888"/>
                 </a:solidFill>
@@ -10080,7 +10080,7 @@
           <a:p>
             <a:pPr algn="r"/>
             <a:r>
-              <a:rPr sz="800" b="0" i="0">
+              <a:rPr sz="1100" b="0" i="0">
                 <a:solidFill>
                   <a:srgbClr val="888888"/>
                 </a:solidFill>
@@ -10201,7 +10201,7 @@
           <a:p>
             <a:pPr algn="l"/>
             <a:r>
-              <a:rPr sz="3600" b="1" i="0">
+              <a:rPr sz="3900" b="1" i="0">
                 <a:solidFill>
                   <a:srgbClr val="E2231A"/>
                 </a:solidFill>
@@ -10236,7 +10236,7 @@
           <a:p>
             <a:pPr algn="l"/>
             <a:r>
-              <a:rPr sz="1100" b="0" i="0">
+              <a:rPr sz="1400" b="0" i="0">
                 <a:solidFill>
                   <a:srgbClr val="4D4D4D"/>
                 </a:solidFill>
@@ -10271,7 +10271,7 @@
           <a:p>
             <a:pPr algn="l"/>
             <a:r>
-              <a:rPr sz="1000" b="0" i="0">
+              <a:rPr sz="1300" b="0" i="0">
                 <a:solidFill>
                   <a:srgbClr val="888888"/>
                 </a:solidFill>
@@ -10392,7 +10392,7 @@
           <a:p>
             <a:pPr algn="l"/>
             <a:r>
-              <a:rPr sz="3600" b="1" i="0">
+              <a:rPr sz="3900" b="1" i="0">
                 <a:solidFill>
                   <a:srgbClr val="D48B00"/>
                 </a:solidFill>
@@ -10427,7 +10427,7 @@
           <a:p>
             <a:pPr algn="l"/>
             <a:r>
-              <a:rPr sz="1100" b="0" i="0">
+              <a:rPr sz="1400" b="0" i="0">
                 <a:solidFill>
                   <a:srgbClr val="4D4D4D"/>
                 </a:solidFill>
@@ -10462,7 +10462,7 @@
           <a:p>
             <a:pPr algn="l"/>
             <a:r>
-              <a:rPr sz="1000" b="0" i="0">
+              <a:rPr sz="1300" b="0" i="0">
                 <a:solidFill>
                   <a:srgbClr val="888888"/>
                 </a:solidFill>
@@ -10583,7 +10583,7 @@
           <a:p>
             <a:pPr algn="l"/>
             <a:r>
-              <a:rPr sz="3600" b="1" i="0">
+              <a:rPr sz="3900" b="1" i="0">
                 <a:solidFill>
                   <a:srgbClr val="2D9C65"/>
                 </a:solidFill>
@@ -10618,7 +10618,7 @@
           <a:p>
             <a:pPr algn="l"/>
             <a:r>
-              <a:rPr sz="1100" b="0" i="0">
+              <a:rPr sz="1400" b="0" i="0">
                 <a:solidFill>
                   <a:srgbClr val="4D4D4D"/>
                 </a:solidFill>
@@ -10653,7 +10653,7 @@
           <a:p>
             <a:pPr algn="l"/>
             <a:r>
-              <a:rPr sz="1000" b="0" i="0">
+              <a:rPr sz="1300" b="0" i="0">
                 <a:solidFill>
                   <a:srgbClr val="888888"/>
                 </a:solidFill>
@@ -10774,7 +10774,7 @@
           <a:p>
             <a:pPr algn="l"/>
             <a:r>
-              <a:rPr sz="1200" b="1" i="0">
+              <a:rPr sz="1500" b="1" i="0">
                 <a:solidFill>
                   <a:srgbClr val="1A1A1A"/>
                 </a:solidFill>
@@ -10938,7 +10938,7 @@
           <a:p>
             <a:pPr algn="l"/>
             <a:r>
-              <a:rPr sz="1200" b="0">
+              <a:rPr sz="1500" b="0">
                 <a:solidFill>
                   <a:srgbClr val="4D4D4D"/>
                 </a:solidFill>
@@ -10954,7 +10954,7 @@
               </a:spcBef>
             </a:pPr>
             <a:r>
-              <a:rPr sz="1200" b="0">
+              <a:rPr sz="1500" b="0">
                 <a:solidFill>
                   <a:srgbClr val="4D4D4D"/>
                 </a:solidFill>
@@ -10970,7 +10970,7 @@
               </a:spcBef>
             </a:pPr>
             <a:r>
-              <a:rPr sz="1200" b="0">
+              <a:rPr sz="1500" b="0">
                 <a:solidFill>
                   <a:srgbClr val="4D4D4D"/>
                 </a:solidFill>
@@ -10986,7 +10986,7 @@
               </a:spcBef>
             </a:pPr>
             <a:r>
-              <a:rPr sz="1200" b="0">
+              <a:rPr sz="1500" b="0">
                 <a:solidFill>
                   <a:srgbClr val="4D4D4D"/>
                 </a:solidFill>
@@ -11002,7 +11002,7 @@
               </a:spcBef>
             </a:pPr>
             <a:r>
-              <a:rPr sz="1200" b="0">
+              <a:rPr sz="1500" b="0">
                 <a:solidFill>
                   <a:srgbClr val="4D4D4D"/>
                 </a:solidFill>
@@ -11080,7 +11080,7 @@
           <a:p>
             <a:pPr algn="ctr"/>
             <a:r>
-              <a:rPr sz="1300" b="1" i="0">
+              <a:rPr sz="1600" b="1" i="0">
                 <a:solidFill>
                   <a:srgbClr val="FFFFFF"/>
                 </a:solidFill>
@@ -11090,7 +11090,7 @@
             </a:r>
             <a:br/>
             <a:r>
-              <a:rPr sz="1300" b="1" i="0">
+              <a:rPr sz="1600" b="1" i="0">
                 <a:solidFill>
                   <a:srgbClr val="FFFFFF"/>
                 </a:solidFill>
@@ -11100,7 +11100,7 @@
             </a:r>
             <a:br/>
             <a:r>
-              <a:rPr sz="1300" b="1" i="0">
+              <a:rPr sz="1600" b="1" i="0">
                 <a:solidFill>
                   <a:srgbClr val="FFFFFF"/>
                 </a:solidFill>
@@ -11110,7 +11110,7 @@
             </a:r>
             <a:br/>
             <a:r>
-              <a:rPr sz="1300" b="1" i="0">
+              <a:rPr sz="1600" b="1" i="0">
                 <a:solidFill>
                   <a:srgbClr val="FFFFFF"/>
                 </a:solidFill>
@@ -11188,7 +11188,7 @@
           <a:p>
             <a:pPr algn="l"/>
             <a:r>
-              <a:rPr sz="1200" b="1" i="0">
+              <a:rPr sz="1500" b="1" i="0">
                 <a:solidFill>
                   <a:srgbClr val="1A1A1A"/>
                 </a:solidFill>
@@ -11352,7 +11352,7 @@
           <a:p>
             <a:pPr algn="l"/>
             <a:r>
-              <a:rPr sz="1200" b="0">
+              <a:rPr sz="1500" b="0">
                 <a:solidFill>
                   <a:srgbClr val="4D4D4D"/>
                 </a:solidFill>
@@ -11368,7 +11368,7 @@
               </a:spcBef>
             </a:pPr>
             <a:r>
-              <a:rPr sz="1200" b="0">
+              <a:rPr sz="1500" b="0">
                 <a:solidFill>
                   <a:srgbClr val="4D4D4D"/>
                 </a:solidFill>
@@ -11384,7 +11384,7 @@
               </a:spcBef>
             </a:pPr>
             <a:r>
-              <a:rPr sz="1200" b="0">
+              <a:rPr sz="1500" b="0">
                 <a:solidFill>
                   <a:srgbClr val="4D4D4D"/>
                 </a:solidFill>
@@ -11400,7 +11400,7 @@
               </a:spcBef>
             </a:pPr>
             <a:r>
-              <a:rPr sz="1200" b="0">
+              <a:rPr sz="1500" b="0">
                 <a:solidFill>
                   <a:srgbClr val="4D4D4D"/>
                 </a:solidFill>
@@ -11416,7 +11416,7 @@
               </a:spcBef>
             </a:pPr>
             <a:r>
-              <a:rPr sz="1200" b="0">
+              <a:rPr sz="1500" b="0">
                 <a:solidFill>
                   <a:srgbClr val="4D4D4D"/>
                 </a:solidFill>
@@ -11451,7 +11451,7 @@
           <a:p>
             <a:pPr algn="ctr"/>
             <a:r>
-              <a:rPr sz="900" b="0" i="0">
+              <a:rPr sz="1200" b="0" i="0">
                 <a:solidFill>
                   <a:srgbClr val="888888"/>
                 </a:solidFill>
@@ -11547,7 +11547,7 @@
           <a:p>
             <a:pPr algn="l"/>
             <a:r>
-              <a:rPr sz="2200" b="1" i="0">
+              <a:rPr sz="2500" b="1" i="0">
                 <a:solidFill>
                   <a:srgbClr val="1A1A1A"/>
                 </a:solidFill>
@@ -11668,7 +11668,7 @@
           <a:p>
             <a:pPr algn="ctr"/>
             <a:r>
-              <a:rPr sz="800" b="0" i="0">
+              <a:rPr sz="1100" b="0" i="0">
                 <a:solidFill>
                   <a:srgbClr val="FFFFFF"/>
                 </a:solidFill>
@@ -11703,7 +11703,7 @@
           <a:p>
             <a:pPr algn="r"/>
             <a:r>
-              <a:rPr sz="800" b="0" i="0">
+              <a:rPr sz="1100" b="0" i="0">
                 <a:solidFill>
                   <a:srgbClr val="888888"/>
                 </a:solidFill>
@@ -11738,7 +11738,7 @@
           <a:p>
             <a:pPr algn="r"/>
             <a:r>
-              <a:rPr sz="800" b="0" i="0">
+              <a:rPr sz="1100" b="0" i="0">
                 <a:solidFill>
                   <a:srgbClr val="888888"/>
                 </a:solidFill>
@@ -11818,7 +11818,7 @@
           <a:p>
             <a:pPr algn="l"/>
             <a:r>
-              <a:rPr sz="1100" b="1" i="0">
+              <a:rPr sz="1400" b="1" i="0">
                 <a:solidFill>
                   <a:srgbClr val="007A87"/>
                 </a:solidFill>
@@ -11898,7 +11898,7 @@
           <a:p>
             <a:pPr algn="l"/>
             <a:r>
-              <a:rPr sz="1100" b="1" i="0">
+              <a:rPr sz="1400" b="1" i="0">
                 <a:solidFill>
                   <a:srgbClr val="E2231A"/>
                 </a:solidFill>
@@ -11978,7 +11978,7 @@
           <a:p>
             <a:pPr algn="l"/>
             <a:r>
-              <a:rPr sz="1100" b="1" i="0">
+              <a:rPr sz="1400" b="1" i="0">
                 <a:solidFill>
                   <a:srgbClr val="2D9C65"/>
                 </a:solidFill>
@@ -12099,7 +12099,7 @@
           <a:p>
             <a:pPr algn="l"/>
             <a:r>
-              <a:rPr sz="3600" b="1" i="0">
+              <a:rPr sz="3900" b="1" i="0">
                 <a:solidFill>
                   <a:srgbClr val="E2231A"/>
                 </a:solidFill>
@@ -12134,7 +12134,7 @@
           <a:p>
             <a:pPr algn="l"/>
             <a:r>
-              <a:rPr sz="1100" b="0" i="0">
+              <a:rPr sz="1400" b="0" i="0">
                 <a:solidFill>
                   <a:srgbClr val="4D4D4D"/>
                 </a:solidFill>
@@ -12169,7 +12169,7 @@
           <a:p>
             <a:pPr algn="l"/>
             <a:r>
-              <a:rPr sz="1000" b="0" i="0">
+              <a:rPr sz="1300" b="0" i="0">
                 <a:solidFill>
                   <a:srgbClr val="888888"/>
                 </a:solidFill>
@@ -12247,7 +12247,7 @@
           <a:p>
             <a:pPr algn="l"/>
             <a:r>
-              <a:rPr sz="3600" b="1" i="0">
+              <a:rPr sz="3900" b="1" i="0">
                 <a:solidFill>
                   <a:srgbClr val="007A87"/>
                 </a:solidFill>
@@ -12282,7 +12282,7 @@
           <a:p>
             <a:pPr algn="l"/>
             <a:r>
-              <a:rPr sz="1100" b="0" i="0">
+              <a:rPr sz="1400" b="0" i="0">
                 <a:solidFill>
                   <a:srgbClr val="4D4D4D"/>
                 </a:solidFill>
@@ -12317,7 +12317,7 @@
           <a:p>
             <a:pPr algn="l"/>
             <a:r>
-              <a:rPr sz="1000" b="0" i="0">
+              <a:rPr sz="1300" b="0" i="0">
                 <a:solidFill>
                   <a:srgbClr val="888888"/>
                 </a:solidFill>
@@ -12395,7 +12395,7 @@
           <a:p>
             <a:pPr algn="l"/>
             <a:r>
-              <a:rPr sz="3600" b="1" i="0">
+              <a:rPr sz="3900" b="1" i="0">
                 <a:solidFill>
                   <a:srgbClr val="2D9C65"/>
                 </a:solidFill>
@@ -12430,7 +12430,7 @@
           <a:p>
             <a:pPr algn="l"/>
             <a:r>
-              <a:rPr sz="1100" b="0" i="0">
+              <a:rPr sz="1400" b="0" i="0">
                 <a:solidFill>
                   <a:srgbClr val="4D4D4D"/>
                 </a:solidFill>
@@ -12465,7 +12465,7 @@
           <a:p>
             <a:pPr algn="l"/>
             <a:r>
-              <a:rPr sz="1000" b="0" i="0">
+              <a:rPr sz="1300" b="0" i="0">
                 <a:solidFill>
                   <a:srgbClr val="888888"/>
                 </a:solidFill>
@@ -12500,7 +12500,7 @@
           <a:p>
             <a:pPr algn="l"/>
             <a:r>
-              <a:rPr sz="3600" b="1" i="0">
+              <a:rPr sz="3900" b="1" i="0">
                 <a:solidFill>
                   <a:srgbClr val="D48B00"/>
                 </a:solidFill>
@@ -12535,7 +12535,7 @@
           <a:p>
             <a:pPr algn="l"/>
             <a:r>
-              <a:rPr sz="1100" b="0" i="0">
+              <a:rPr sz="1400" b="0" i="0">
                 <a:solidFill>
                   <a:srgbClr val="4D4D4D"/>
                 </a:solidFill>
@@ -12570,7 +12570,7 @@
           <a:p>
             <a:pPr algn="l"/>
             <a:r>
-              <a:rPr sz="1000" b="0" i="0">
+              <a:rPr sz="1300" b="0" i="0">
                 <a:solidFill>
                   <a:srgbClr val="888888"/>
                 </a:solidFill>
@@ -12605,7 +12605,7 @@
           <a:p>
             <a:pPr algn="l"/>
             <a:r>
-              <a:rPr sz="800" b="0" i="0">
+              <a:rPr sz="1100" b="0" i="0">
                 <a:solidFill>
                   <a:srgbClr val="888888"/>
                 </a:solidFill>
@@ -12701,7 +12701,7 @@
           <a:p>
             <a:pPr algn="l"/>
             <a:r>
-              <a:rPr sz="2200" b="1" i="0">
+              <a:rPr sz="2500" b="1" i="0">
                 <a:solidFill>
                   <a:srgbClr val="1A1A1A"/>
                 </a:solidFill>
@@ -12822,7 +12822,7 @@
           <a:p>
             <a:pPr algn="ctr"/>
             <a:r>
-              <a:rPr sz="800" b="0" i="0">
+              <a:rPr sz="1100" b="0" i="0">
                 <a:solidFill>
                   <a:srgbClr val="FFFFFF"/>
                 </a:solidFill>
@@ -12857,7 +12857,7 @@
           <a:p>
             <a:pPr algn="r"/>
             <a:r>
-              <a:rPr sz="800" b="0" i="0">
+              <a:rPr sz="1100" b="0" i="0">
                 <a:solidFill>
                   <a:srgbClr val="888888"/>
                 </a:solidFill>
@@ -12892,7 +12892,7 @@
           <a:p>
             <a:pPr algn="r"/>
             <a:r>
-              <a:rPr sz="800" b="0" i="0">
+              <a:rPr sz="1100" b="0" i="0">
                 <a:solidFill>
                   <a:srgbClr val="888888"/>
                 </a:solidFill>
@@ -13013,7 +13013,7 @@
           <a:p>
             <a:pPr algn="l"/>
             <a:r>
-              <a:rPr sz="1050" b="0" i="0">
+              <a:rPr sz="1350" b="0" i="0">
                 <a:solidFill>
                   <a:srgbClr val="FFFFFF"/>
                 </a:solidFill>
@@ -13134,7 +13134,7 @@
           <a:p>
             <a:pPr algn="l"/>
             <a:r>
-              <a:rPr sz="1300" b="1" i="0">
+              <a:rPr sz="1600" b="1" i="0">
                 <a:solidFill>
                   <a:srgbClr val="1A1A1A"/>
                 </a:solidFill>
@@ -13212,7 +13212,7 @@
           <a:p>
             <a:pPr algn="l"/>
             <a:r>
-              <a:rPr sz="1100" b="0">
+              <a:rPr sz="1400" b="0">
                 <a:solidFill>
                   <a:srgbClr val="4D4D4D"/>
                 </a:solidFill>
@@ -13228,7 +13228,7 @@
               </a:spcBef>
             </a:pPr>
             <a:r>
-              <a:rPr sz="1100" b="0">
+              <a:rPr sz="1400" b="0">
                 <a:solidFill>
                   <a:srgbClr val="4D4D4D"/>
                 </a:solidFill>
@@ -13244,7 +13244,7 @@
               </a:spcBef>
             </a:pPr>
             <a:r>
-              <a:rPr sz="1100" b="0">
+              <a:rPr sz="1400" b="0">
                 <a:solidFill>
                   <a:srgbClr val="4D4D4D"/>
                 </a:solidFill>
@@ -13260,7 +13260,7 @@
               </a:spcBef>
             </a:pPr>
             <a:r>
-              <a:rPr sz="1100" b="0">
+              <a:rPr sz="1400" b="0">
                 <a:solidFill>
                   <a:srgbClr val="4D4D4D"/>
                 </a:solidFill>
@@ -13381,7 +13381,7 @@
           <a:p>
             <a:pPr algn="l"/>
             <a:r>
-              <a:rPr sz="1300" b="1" i="0">
+              <a:rPr sz="1600" b="1" i="0">
                 <a:solidFill>
                   <a:srgbClr val="1A1A1A"/>
                 </a:solidFill>
@@ -13459,7 +13459,7 @@
           <a:p>
             <a:pPr algn="l"/>
             <a:r>
-              <a:rPr sz="1100" b="0">
+              <a:rPr sz="1400" b="0">
                 <a:solidFill>
                   <a:srgbClr val="4D4D4D"/>
                 </a:solidFill>
@@ -13475,7 +13475,7 @@
               </a:spcBef>
             </a:pPr>
             <a:r>
-              <a:rPr sz="1100" b="0">
+              <a:rPr sz="1400" b="0">
                 <a:solidFill>
                   <a:srgbClr val="4D4D4D"/>
                 </a:solidFill>
@@ -13491,7 +13491,7 @@
               </a:spcBef>
             </a:pPr>
             <a:r>
-              <a:rPr sz="1100" b="0">
+              <a:rPr sz="1400" b="0">
                 <a:solidFill>
                   <a:srgbClr val="4D4D4D"/>
                 </a:solidFill>
@@ -13507,7 +13507,7 @@
               </a:spcBef>
             </a:pPr>
             <a:r>
-              <a:rPr sz="1100" b="0">
+              <a:rPr sz="1400" b="0">
                 <a:solidFill>
                   <a:srgbClr val="4D4D4D"/>
                 </a:solidFill>
@@ -13628,7 +13628,7 @@
           <a:p>
             <a:pPr algn="l"/>
             <a:r>
-              <a:rPr sz="1300" b="1" i="0">
+              <a:rPr sz="1600" b="1" i="0">
                 <a:solidFill>
                   <a:srgbClr val="1A1A1A"/>
                 </a:solidFill>
@@ -13706,7 +13706,7 @@
           <a:p>
             <a:pPr algn="l"/>
             <a:r>
-              <a:rPr sz="1100" b="0">
+              <a:rPr sz="1400" b="0">
                 <a:solidFill>
                   <a:srgbClr val="4D4D4D"/>
                 </a:solidFill>
@@ -13722,7 +13722,7 @@
               </a:spcBef>
             </a:pPr>
             <a:r>
-              <a:rPr sz="1100" b="0">
+              <a:rPr sz="1400" b="0">
                 <a:solidFill>
                   <a:srgbClr val="4D4D4D"/>
                 </a:solidFill>
@@ -13738,7 +13738,7 @@
               </a:spcBef>
             </a:pPr>
             <a:r>
-              <a:rPr sz="1100" b="0">
+              <a:rPr sz="1400" b="0">
                 <a:solidFill>
                   <a:srgbClr val="4D4D4D"/>
                 </a:solidFill>
@@ -13754,7 +13754,7 @@
               </a:spcBef>
             </a:pPr>
             <a:r>
-              <a:rPr sz="1100" b="0">
+              <a:rPr sz="1400" b="0">
                 <a:solidFill>
                   <a:srgbClr val="4D4D4D"/>
                 </a:solidFill>
@@ -13875,7 +13875,7 @@
           <a:p>
             <a:pPr algn="l"/>
             <a:r>
-              <a:rPr sz="1300" b="1" i="0">
+              <a:rPr sz="1600" b="1" i="0">
                 <a:solidFill>
                   <a:srgbClr val="1A1A1A"/>
                 </a:solidFill>
@@ -13953,7 +13953,7 @@
           <a:p>
             <a:pPr algn="l"/>
             <a:r>
-              <a:rPr sz="1100" b="0">
+              <a:rPr sz="1400" b="0">
                 <a:solidFill>
                   <a:srgbClr val="4D4D4D"/>
                 </a:solidFill>
@@ -13969,7 +13969,7 @@
               </a:spcBef>
             </a:pPr>
             <a:r>
-              <a:rPr sz="1100" b="0">
+              <a:rPr sz="1400" b="0">
                 <a:solidFill>
                   <a:srgbClr val="4D4D4D"/>
                 </a:solidFill>
@@ -13985,7 +13985,7 @@
               </a:spcBef>
             </a:pPr>
             <a:r>
-              <a:rPr sz="1100" b="0">
+              <a:rPr sz="1400" b="0">
                 <a:solidFill>
                   <a:srgbClr val="4D4D4D"/>
                 </a:solidFill>
@@ -14001,7 +14001,7 @@
               </a:spcBef>
             </a:pPr>
             <a:r>
-              <a:rPr sz="1100" b="0">
+              <a:rPr sz="1400" b="0">
                 <a:solidFill>
                   <a:srgbClr val="4D4D4D"/>
                 </a:solidFill>
@@ -14097,7 +14097,7 @@
           <a:p>
             <a:pPr algn="l"/>
             <a:r>
-              <a:rPr sz="2200" b="1" i="0">
+              <a:rPr sz="2500" b="1" i="0">
                 <a:solidFill>
                   <a:srgbClr val="1A1A1A"/>
                 </a:solidFill>
@@ -14218,7 +14218,7 @@
           <a:p>
             <a:pPr algn="ctr"/>
             <a:r>
-              <a:rPr sz="800" b="0" i="0">
+              <a:rPr sz="1100" b="0" i="0">
                 <a:solidFill>
                   <a:srgbClr val="FFFFFF"/>
                 </a:solidFill>
@@ -14253,7 +14253,7 @@
           <a:p>
             <a:pPr algn="r"/>
             <a:r>
-              <a:rPr sz="800" b="0" i="0">
+              <a:rPr sz="1100" b="0" i="0">
                 <a:solidFill>
                   <a:srgbClr val="888888"/>
                 </a:solidFill>
@@ -14288,7 +14288,7 @@
           <a:p>
             <a:pPr algn="r"/>
             <a:r>
-              <a:rPr sz="800" b="0" i="0">
+              <a:rPr sz="1100" b="0" i="0">
                 <a:solidFill>
                   <a:srgbClr val="888888"/>
                 </a:solidFill>
@@ -15257,7 +15257,7 @@
           <a:p>
             <a:pPr algn="ctr"/>
             <a:r>
-              <a:rPr sz="1300" b="1" i="0">
+              <a:rPr sz="1600" b="1" i="0">
                 <a:solidFill>
                   <a:srgbClr val="FFFFFF"/>
                 </a:solidFill>
@@ -15292,7 +15292,7 @@
           <a:p>
             <a:pPr algn="ctr"/>
             <a:r>
-              <a:rPr sz="1000" b="0" i="0">
+              <a:rPr sz="1300" b="0" i="0">
                 <a:solidFill>
                   <a:srgbClr val="FFFFFF"/>
                 </a:solidFill>
@@ -15370,7 +15370,7 @@
           <a:p>
             <a:pPr algn="ctr"/>
             <a:r>
-              <a:rPr sz="1300" b="1" i="0">
+              <a:rPr sz="1600" b="1" i="0">
                 <a:solidFill>
                   <a:srgbClr val="FFFFFF"/>
                 </a:solidFill>
@@ -15405,7 +15405,7 @@
           <a:p>
             <a:pPr algn="ctr"/>
             <a:r>
-              <a:rPr sz="1000" b="0" i="0">
+              <a:rPr sz="1300" b="0" i="0">
                 <a:solidFill>
                   <a:srgbClr val="FFFFFF"/>
                 </a:solidFill>
@@ -15483,7 +15483,7 @@
           <a:p>
             <a:pPr algn="ctr"/>
             <a:r>
-              <a:rPr sz="1300" b="1" i="0">
+              <a:rPr sz="1600" b="1" i="0">
                 <a:solidFill>
                   <a:srgbClr val="FFFFFF"/>
                 </a:solidFill>
@@ -15518,7 +15518,7 @@
           <a:p>
             <a:pPr algn="ctr"/>
             <a:r>
-              <a:rPr sz="1000" b="0" i="0">
+              <a:rPr sz="1300" b="0" i="0">
                 <a:solidFill>
                   <a:srgbClr val="FFFFFF"/>
                 </a:solidFill>
@@ -15614,7 +15614,7 @@
           <a:p>
             <a:pPr algn="l"/>
             <a:r>
-              <a:rPr sz="2200" b="1" i="0">
+              <a:rPr sz="2500" b="1" i="0">
                 <a:solidFill>
                   <a:srgbClr val="1A1A1A"/>
                 </a:solidFill>
@@ -15735,7 +15735,7 @@
           <a:p>
             <a:pPr algn="ctr"/>
             <a:r>
-              <a:rPr sz="800" b="0" i="0">
+              <a:rPr sz="1100" b="0" i="0">
                 <a:solidFill>
                   <a:srgbClr val="FFFFFF"/>
                 </a:solidFill>
@@ -15770,7 +15770,7 @@
           <a:p>
             <a:pPr algn="r"/>
             <a:r>
-              <a:rPr sz="800" b="0" i="0">
+              <a:rPr sz="1100" b="0" i="0">
                 <a:solidFill>
                   <a:srgbClr val="888888"/>
                 </a:solidFill>
@@ -15805,7 +15805,7 @@
           <a:p>
             <a:pPr algn="r"/>
             <a:r>
-              <a:rPr sz="800" b="0" i="0">
+              <a:rPr sz="1100" b="0" i="0">
                 <a:solidFill>
                   <a:srgbClr val="888888"/>
                 </a:solidFill>
@@ -15926,7 +15926,7 @@
           <a:p>
             <a:pPr algn="l"/>
             <a:r>
-              <a:rPr sz="1050" b="0" i="0">
+              <a:rPr sz="1350" b="0" i="0">
                 <a:solidFill>
                   <a:srgbClr val="FFFFFF"/>
                 </a:solidFill>
@@ -16090,7 +16090,7 @@
           <a:p>
             <a:pPr algn="ctr"/>
             <a:r>
-              <a:rPr sz="1300" b="1" i="0">
+              <a:rPr sz="1600" b="1" i="0">
                 <a:solidFill>
                   <a:srgbClr val="FFFFFF"/>
                 </a:solidFill>
@@ -16125,7 +16125,7 @@
           <a:p>
             <a:pPr algn="l"/>
             <a:r>
-              <a:rPr sz="1200" b="1" i="0">
+              <a:rPr sz="1500" b="1" i="0">
                 <a:solidFill>
                   <a:srgbClr val="1A1A1A"/>
                 </a:solidFill>
@@ -16160,7 +16160,7 @@
           <a:p>
             <a:pPr algn="l"/>
             <a:r>
-              <a:rPr sz="1000" b="0" i="0">
+              <a:rPr sz="1300" b="0" i="0">
                 <a:solidFill>
                   <a:srgbClr val="4D4D4D"/>
                 </a:solidFill>
@@ -16367,7 +16367,7 @@
           <a:p>
             <a:pPr algn="ctr"/>
             <a:r>
-              <a:rPr sz="1300" b="1" i="0">
+              <a:rPr sz="1600" b="1" i="0">
                 <a:solidFill>
                   <a:srgbClr val="FFFFFF"/>
                 </a:solidFill>
@@ -16402,7 +16402,7 @@
           <a:p>
             <a:pPr algn="l"/>
             <a:r>
-              <a:rPr sz="1200" b="1" i="0">
+              <a:rPr sz="1500" b="1" i="0">
                 <a:solidFill>
                   <a:srgbClr val="1A1A1A"/>
                 </a:solidFill>
@@ -16437,7 +16437,7 @@
           <a:p>
             <a:pPr algn="l"/>
             <a:r>
-              <a:rPr sz="1000" b="0" i="0">
+              <a:rPr sz="1300" b="0" i="0">
                 <a:solidFill>
                   <a:srgbClr val="4D4D4D"/>
                 </a:solidFill>
@@ -16644,7 +16644,7 @@
           <a:p>
             <a:pPr algn="ctr"/>
             <a:r>
-              <a:rPr sz="1300" b="1" i="0">
+              <a:rPr sz="1600" b="1" i="0">
                 <a:solidFill>
                   <a:srgbClr val="FFFFFF"/>
                 </a:solidFill>
@@ -16679,7 +16679,7 @@
           <a:p>
             <a:pPr algn="l"/>
             <a:r>
-              <a:rPr sz="1200" b="1" i="0">
+              <a:rPr sz="1500" b="1" i="0">
                 <a:solidFill>
                   <a:srgbClr val="1A1A1A"/>
                 </a:solidFill>
@@ -16714,7 +16714,7 @@
           <a:p>
             <a:pPr algn="l"/>
             <a:r>
-              <a:rPr sz="1000" b="0" i="0">
+              <a:rPr sz="1300" b="0" i="0">
                 <a:solidFill>
                   <a:srgbClr val="4D4D4D"/>
                 </a:solidFill>
@@ -16921,7 +16921,7 @@
           <a:p>
             <a:pPr algn="ctr"/>
             <a:r>
-              <a:rPr sz="1300" b="1" i="0">
+              <a:rPr sz="1600" b="1" i="0">
                 <a:solidFill>
                   <a:srgbClr val="FFFFFF"/>
                 </a:solidFill>
@@ -16956,7 +16956,7 @@
           <a:p>
             <a:pPr algn="l"/>
             <a:r>
-              <a:rPr sz="1200" b="1" i="0">
+              <a:rPr sz="1500" b="1" i="0">
                 <a:solidFill>
                   <a:srgbClr val="1A1A1A"/>
                 </a:solidFill>
@@ -16991,7 +16991,7 @@
           <a:p>
             <a:pPr algn="l"/>
             <a:r>
-              <a:rPr sz="1000" b="0" i="0">
+              <a:rPr sz="1300" b="0" i="0">
                 <a:solidFill>
                   <a:srgbClr val="4D4D4D"/>
                 </a:solidFill>
@@ -17198,7 +17198,7 @@
           <a:p>
             <a:pPr algn="ctr"/>
             <a:r>
-              <a:rPr sz="1300" b="1" i="0">
+              <a:rPr sz="1600" b="1" i="0">
                 <a:solidFill>
                   <a:srgbClr val="FFFFFF"/>
                 </a:solidFill>
@@ -17233,7 +17233,7 @@
           <a:p>
             <a:pPr algn="l"/>
             <a:r>
-              <a:rPr sz="1200" b="1" i="0">
+              <a:rPr sz="1500" b="1" i="0">
                 <a:solidFill>
                   <a:srgbClr val="1A1A1A"/>
                 </a:solidFill>
@@ -17268,7 +17268,7 @@
           <a:p>
             <a:pPr algn="l"/>
             <a:r>
-              <a:rPr sz="1000" b="0" i="0">
+              <a:rPr sz="1300" b="0" i="0">
                 <a:solidFill>
                   <a:srgbClr val="4D4D4D"/>
                 </a:solidFill>
@@ -17346,7 +17346,7 @@
           <a:p>
             <a:pPr algn="l"/>
             <a:r>
-              <a:rPr sz="1200" b="1" i="0">
+              <a:rPr sz="1500" b="1" i="0">
                 <a:solidFill>
                   <a:srgbClr val="1A1A1A"/>
                 </a:solidFill>
@@ -17512,7 +17512,7 @@
           <a:p>
             <a:pPr algn="l"/>
             <a:r>
-              <a:rPr sz="1100" b="1" i="0">
+              <a:rPr sz="1400" b="1" i="0">
                 <a:solidFill>
                   <a:srgbClr val="1A1A1A"/>
                 </a:solidFill>
@@ -17547,7 +17547,7 @@
           <a:p>
             <a:pPr algn="l"/>
             <a:r>
-              <a:rPr sz="1000" b="0" i="0">
+              <a:rPr sz="1300" b="0" i="0">
                 <a:solidFill>
                   <a:srgbClr val="888888"/>
                 </a:solidFill>
@@ -17670,7 +17670,7 @@
           <a:p>
             <a:pPr algn="l"/>
             <a:r>
-              <a:rPr sz="1100" b="1" i="0">
+              <a:rPr sz="1400" b="1" i="0">
                 <a:solidFill>
                   <a:srgbClr val="1A1A1A"/>
                 </a:solidFill>
@@ -17705,7 +17705,7 @@
           <a:p>
             <a:pPr algn="l"/>
             <a:r>
-              <a:rPr sz="1000" b="0" i="0">
+              <a:rPr sz="1300" b="0" i="0">
                 <a:solidFill>
                   <a:srgbClr val="888888"/>
                 </a:solidFill>
@@ -17828,7 +17828,7 @@
           <a:p>
             <a:pPr algn="l"/>
             <a:r>
-              <a:rPr sz="1100" b="1" i="0">
+              <a:rPr sz="1400" b="1" i="0">
                 <a:solidFill>
                   <a:srgbClr val="1A1A1A"/>
                 </a:solidFill>
@@ -17863,7 +17863,7 @@
           <a:p>
             <a:pPr algn="l"/>
             <a:r>
-              <a:rPr sz="1000" b="0" i="0">
+              <a:rPr sz="1300" b="0" i="0">
                 <a:solidFill>
                   <a:srgbClr val="888888"/>
                 </a:solidFill>
@@ -17941,7 +17941,7 @@
           <a:p>
             <a:pPr algn="l"/>
             <a:r>
-              <a:rPr sz="1200" b="1" i="0">
+              <a:rPr sz="1500" b="1" i="0">
                 <a:solidFill>
                   <a:srgbClr val="1A1A1A"/>
                 </a:solidFill>
@@ -18105,7 +18105,7 @@
           <a:p>
             <a:pPr algn="l"/>
             <a:r>
-              <a:rPr sz="1100" b="0">
+              <a:rPr sz="1400" b="0">
                 <a:solidFill>
                   <a:srgbClr val="08254D"/>
                 </a:solidFill>
@@ -18121,7 +18121,7 @@
               </a:spcBef>
             </a:pPr>
             <a:r>
-              <a:rPr sz="1100" b="0">
+              <a:rPr sz="1400" b="0">
                 <a:solidFill>
                   <a:srgbClr val="08254D"/>
                 </a:solidFill>
@@ -18137,7 +18137,7 @@
               </a:spcBef>
             </a:pPr>
             <a:r>
-              <a:rPr sz="1100" b="0">
+              <a:rPr sz="1400" b="0">
                 <a:solidFill>
                   <a:srgbClr val="08254D"/>
                 </a:solidFill>
@@ -18215,7 +18215,7 @@
           <a:p>
             <a:pPr algn="l"/>
             <a:r>
-              <a:rPr sz="1200" b="1" i="0">
+              <a:rPr sz="1500" b="1" i="0">
                 <a:solidFill>
                   <a:srgbClr val="1A1A1A"/>
                 </a:solidFill>
@@ -18379,7 +18379,7 @@
           <a:p>
             <a:pPr algn="l"/>
             <a:r>
-              <a:rPr sz="1050" b="0" i="0">
+              <a:rPr sz="1350" b="0" i="0">
                 <a:solidFill>
                   <a:srgbClr val="1A1A1A"/>
                 </a:solidFill>
@@ -18414,7 +18414,7 @@
           <a:p>
             <a:pPr algn="ctr"/>
             <a:r>
-              <a:rPr sz="900" b="0" i="0">
+              <a:rPr sz="1200" b="0" i="0">
                 <a:solidFill>
                   <a:srgbClr val="888888"/>
                 </a:solidFill>
@@ -18510,7 +18510,7 @@
           <a:p>
             <a:pPr algn="l"/>
             <a:r>
-              <a:rPr sz="2200" b="1" i="0">
+              <a:rPr sz="2500" b="1" i="0">
                 <a:solidFill>
                   <a:srgbClr val="1A1A1A"/>
                 </a:solidFill>
@@ -18631,7 +18631,7 @@
           <a:p>
             <a:pPr algn="ctr"/>
             <a:r>
-              <a:rPr sz="800" b="0" i="0">
+              <a:rPr sz="1100" b="0" i="0">
                 <a:solidFill>
                   <a:srgbClr val="FFFFFF"/>
                 </a:solidFill>
@@ -18666,7 +18666,7 @@
           <a:p>
             <a:pPr algn="r"/>
             <a:r>
-              <a:rPr sz="800" b="0" i="0">
+              <a:rPr sz="1100" b="0" i="0">
                 <a:solidFill>
                   <a:srgbClr val="888888"/>
                 </a:solidFill>
@@ -18701,7 +18701,7 @@
           <a:p>
             <a:pPr algn="r"/>
             <a:r>
-              <a:rPr sz="800" b="0" i="0">
+              <a:rPr sz="1100" b="0" i="0">
                 <a:solidFill>
                   <a:srgbClr val="888888"/>
                 </a:solidFill>
@@ -18822,7 +18822,7 @@
           <a:p>
             <a:pPr algn="ctr"/>
             <a:r>
-              <a:rPr sz="1300" b="1" i="0">
+              <a:rPr sz="1600" b="1" i="0">
                 <a:solidFill>
                   <a:srgbClr val="FFFFFF"/>
                 </a:solidFill>
@@ -18900,7 +18900,7 @@
           <a:p>
             <a:pPr algn="l"/>
             <a:r>
-              <a:rPr sz="1100" b="0" i="0">
+              <a:rPr sz="1400" b="0" i="0">
                 <a:solidFill>
                   <a:srgbClr val="4D4D4D"/>
                 </a:solidFill>
@@ -18935,7 +18935,7 @@
           <a:p>
             <a:pPr algn="l"/>
             <a:r>
-              <a:rPr sz="1100" b="0" i="0">
+              <a:rPr sz="1400" b="0" i="0">
                 <a:solidFill>
                   <a:srgbClr val="4D4D4D"/>
                 </a:solidFill>
@@ -18970,7 +18970,7 @@
           <a:p>
             <a:pPr algn="l"/>
             <a:r>
-              <a:rPr sz="1100" b="0" i="0">
+              <a:rPr sz="1400" b="0" i="0">
                 <a:solidFill>
                   <a:srgbClr val="4D4D4D"/>
                 </a:solidFill>
@@ -19005,7 +19005,7 @@
           <a:p>
             <a:pPr algn="l"/>
             <a:r>
-              <a:rPr sz="1100" b="0" i="0">
+              <a:rPr sz="1400" b="0" i="0">
                 <a:solidFill>
                   <a:srgbClr val="4D4D4D"/>
                 </a:solidFill>
@@ -19169,7 +19169,7 @@
           <a:p>
             <a:pPr algn="ctr"/>
             <a:r>
-              <a:rPr sz="1300" b="1" i="0">
+              <a:rPr sz="1600" b="1" i="0">
                 <a:solidFill>
                   <a:srgbClr val="FFFFFF"/>
                 </a:solidFill>
@@ -19247,7 +19247,7 @@
           <a:p>
             <a:pPr algn="ctr"/>
             <a:r>
-              <a:rPr sz="900" b="1" i="0">
+              <a:rPr sz="1200" b="1" i="0">
                 <a:solidFill>
                   <a:srgbClr val="FFFFFF"/>
                 </a:solidFill>
@@ -19325,7 +19325,7 @@
           <a:p>
             <a:pPr algn="l"/>
             <a:r>
-              <a:rPr sz="1100" b="0" i="0">
+              <a:rPr sz="1400" b="0" i="0">
                 <a:solidFill>
                   <a:srgbClr val="4D4D4D"/>
                 </a:solidFill>
@@ -19360,7 +19360,7 @@
           <a:p>
             <a:pPr algn="l"/>
             <a:r>
-              <a:rPr sz="1100" b="0" i="0">
+              <a:rPr sz="1400" b="0" i="0">
                 <a:solidFill>
                   <a:srgbClr val="4D4D4D"/>
                 </a:solidFill>
@@ -19395,7 +19395,7 @@
           <a:p>
             <a:pPr algn="l"/>
             <a:r>
-              <a:rPr sz="1100" b="0" i="0">
+              <a:rPr sz="1400" b="0" i="0">
                 <a:solidFill>
                   <a:srgbClr val="4D4D4D"/>
                 </a:solidFill>
@@ -19430,7 +19430,7 @@
           <a:p>
             <a:pPr algn="l"/>
             <a:r>
-              <a:rPr sz="1100" b="0" i="0">
+              <a:rPr sz="1400" b="0" i="0">
                 <a:solidFill>
                   <a:srgbClr val="4D4D4D"/>
                 </a:solidFill>
@@ -19465,7 +19465,7 @@
           <a:p>
             <a:pPr algn="l"/>
             <a:r>
-              <a:rPr sz="1100" b="0" i="0">
+              <a:rPr sz="1400" b="0" i="0">
                 <a:solidFill>
                   <a:srgbClr val="4D4D4D"/>
                 </a:solidFill>
@@ -19629,7 +19629,7 @@
           <a:p>
             <a:pPr algn="ctr"/>
             <a:r>
-              <a:rPr sz="1300" b="1" i="0">
+              <a:rPr sz="1600" b="1" i="0">
                 <a:solidFill>
                   <a:srgbClr val="FFFFFF"/>
                 </a:solidFill>
@@ -19707,7 +19707,7 @@
           <a:p>
             <a:pPr algn="l"/>
             <a:r>
-              <a:rPr sz="1100" b="0" i="0">
+              <a:rPr sz="1400" b="0" i="0">
                 <a:solidFill>
                   <a:srgbClr val="4D4D4D"/>
                 </a:solidFill>
@@ -19742,7 +19742,7 @@
           <a:p>
             <a:pPr algn="l"/>
             <a:r>
-              <a:rPr sz="1100" b="0" i="0">
+              <a:rPr sz="1400" b="0" i="0">
                 <a:solidFill>
                   <a:srgbClr val="4D4D4D"/>
                 </a:solidFill>
@@ -19777,7 +19777,7 @@
           <a:p>
             <a:pPr algn="l"/>
             <a:r>
-              <a:rPr sz="1100" b="0" i="0">
+              <a:rPr sz="1400" b="0" i="0">
                 <a:solidFill>
                   <a:srgbClr val="4D4D4D"/>
                 </a:solidFill>
@@ -19812,7 +19812,7 @@
           <a:p>
             <a:pPr algn="l"/>
             <a:r>
-              <a:rPr sz="1100" b="0" i="0">
+              <a:rPr sz="1400" b="0" i="0">
                 <a:solidFill>
                   <a:srgbClr val="4D4D4D"/>
                 </a:solidFill>
@@ -19847,7 +19847,7 @@
           <a:p>
             <a:pPr algn="l"/>
             <a:r>
-              <a:rPr sz="1100" b="0" i="0">
+              <a:rPr sz="1400" b="0" i="0">
                 <a:solidFill>
                   <a:srgbClr val="4D4D4D"/>
                 </a:solidFill>
@@ -20011,7 +20011,7 @@
           <a:p>
             <a:pPr algn="ctr"/>
             <a:r>
-              <a:rPr sz="1100" b="1" i="0">
+              <a:rPr sz="1400" b="1" i="0">
                 <a:solidFill>
                   <a:srgbClr val="FFFFFF"/>
                 </a:solidFill>
@@ -20046,7 +20046,7 @@
           <a:p>
             <a:pPr algn="ctr"/>
             <a:r>
-              <a:rPr sz="1600" b="1" i="0">
+              <a:rPr sz="1900" b="1" i="0">
                 <a:solidFill>
                   <a:srgbClr val="E2231A"/>
                 </a:solidFill>
@@ -20124,7 +20124,7 @@
           <a:p>
             <a:pPr algn="ctr"/>
             <a:r>
-              <a:rPr sz="1100" b="1" i="0">
+              <a:rPr sz="1400" b="1" i="0">
                 <a:solidFill>
                   <a:srgbClr val="FFFFFF"/>
                 </a:solidFill>
@@ -20159,7 +20159,7 @@
           <a:p>
             <a:pPr algn="ctr"/>
             <a:r>
-              <a:rPr sz="1600" b="1" i="0">
+              <a:rPr sz="1900" b="1" i="0">
                 <a:solidFill>
                   <a:srgbClr val="E2231A"/>
                 </a:solidFill>
@@ -20237,7 +20237,7 @@
           <a:p>
             <a:pPr algn="ctr"/>
             <a:r>
-              <a:rPr sz="1100" b="1" i="0">
+              <a:rPr sz="1400" b="1" i="0">
                 <a:solidFill>
                   <a:srgbClr val="FFFFFF"/>
                 </a:solidFill>
@@ -20272,7 +20272,7 @@
           <a:p>
             <a:pPr algn="ctr"/>
             <a:r>
-              <a:rPr sz="1600" b="1" i="0">
+              <a:rPr sz="1900" b="1" i="0">
                 <a:solidFill>
                   <a:srgbClr val="E2231A"/>
                 </a:solidFill>
@@ -20350,7 +20350,7 @@
           <a:p>
             <a:pPr algn="ctr"/>
             <a:r>
-              <a:rPr sz="1100" b="1" i="0">
+              <a:rPr sz="1400" b="1" i="0">
                 <a:solidFill>
                   <a:srgbClr val="FFFFFF"/>
                 </a:solidFill>
@@ -20385,7 +20385,7 @@
           <a:p>
             <a:pPr algn="ctr"/>
             <a:r>
-              <a:rPr sz="1600" b="1" i="0">
+              <a:rPr sz="1900" b="1" i="0">
                 <a:solidFill>
                   <a:srgbClr val="E2231A"/>
                 </a:solidFill>
@@ -20463,7 +20463,7 @@
           <a:p>
             <a:pPr algn="ctr"/>
             <a:r>
-              <a:rPr sz="1100" b="1" i="0">
+              <a:rPr sz="1400" b="1" i="0">
                 <a:solidFill>
                   <a:srgbClr val="FFFFFF"/>
                 </a:solidFill>
@@ -20541,7 +20541,7 @@
           <a:p>
             <a:pPr algn="ctr"/>
             <a:r>
-              <a:rPr sz="1000" b="0" i="0">
+              <a:rPr sz="1300" b="0" i="0">
                 <a:solidFill>
                   <a:srgbClr val="4D4D4D"/>
                 </a:solidFill>
@@ -20637,7 +20637,7 @@
           <a:p>
             <a:pPr algn="l"/>
             <a:r>
-              <a:rPr sz="2200" b="1" i="0">
+              <a:rPr sz="2500" b="1" i="0">
                 <a:solidFill>
                   <a:srgbClr val="1A1A1A"/>
                 </a:solidFill>
@@ -20758,7 +20758,7 @@
           <a:p>
             <a:pPr algn="ctr"/>
             <a:r>
-              <a:rPr sz="800" b="0" i="0">
+              <a:rPr sz="1100" b="0" i="0">
                 <a:solidFill>
                   <a:srgbClr val="FFFFFF"/>
                 </a:solidFill>
@@ -20793,7 +20793,7 @@
           <a:p>
             <a:pPr algn="r"/>
             <a:r>
-              <a:rPr sz="800" b="0" i="0">
+              <a:rPr sz="1100" b="0" i="0">
                 <a:solidFill>
                   <a:srgbClr val="888888"/>
                 </a:solidFill>
@@ -20828,7 +20828,7 @@
           <a:p>
             <a:pPr algn="r"/>
             <a:r>
-              <a:rPr sz="800" b="0" i="0">
+              <a:rPr sz="1100" b="0" i="0">
                 <a:solidFill>
                   <a:srgbClr val="888888"/>
                 </a:solidFill>
@@ -20973,7 +20973,7 @@
           <a:p>
             <a:pPr algn="l"/>
             <a:r>
-              <a:rPr sz="1100" b="1" i="0">
+              <a:rPr sz="1400" b="1" i="0">
                 <a:solidFill>
                   <a:srgbClr val="007A87"/>
                 </a:solidFill>
@@ -21008,7 +21008,7 @@
           <a:p>
             <a:pPr algn="l"/>
             <a:r>
-              <a:rPr sz="950" b="0">
+              <a:rPr sz="1250" b="0">
                 <a:solidFill>
                   <a:srgbClr val="4D4D4D"/>
                 </a:solidFill>
@@ -21024,7 +21024,7 @@
               </a:spcBef>
             </a:pPr>
             <a:r>
-              <a:rPr sz="950" b="0">
+              <a:rPr sz="1250" b="0">
                 <a:solidFill>
                   <a:srgbClr val="4D4D4D"/>
                 </a:solidFill>
@@ -21145,7 +21145,7 @@
           <a:p>
             <a:pPr algn="l"/>
             <a:r>
-              <a:rPr sz="1100" b="1" i="0">
+              <a:rPr sz="1400" b="1" i="0">
                 <a:solidFill>
                   <a:srgbClr val="E2231A"/>
                 </a:solidFill>
@@ -21180,7 +21180,7 @@
           <a:p>
             <a:pPr algn="l"/>
             <a:r>
-              <a:rPr sz="950" b="0">
+              <a:rPr sz="1250" b="0">
                 <a:solidFill>
                   <a:srgbClr val="4D4D4D"/>
                 </a:solidFill>
@@ -21196,7 +21196,7 @@
               </a:spcBef>
             </a:pPr>
             <a:r>
-              <a:rPr sz="950" b="0">
+              <a:rPr sz="1250" b="0">
                 <a:solidFill>
                   <a:srgbClr val="4D4D4D"/>
                 </a:solidFill>
@@ -21317,7 +21317,7 @@
           <a:p>
             <a:pPr algn="l"/>
             <a:r>
-              <a:rPr sz="1100" b="1" i="0">
+              <a:rPr sz="1400" b="1" i="0">
                 <a:solidFill>
                   <a:srgbClr val="D48B00"/>
                 </a:solidFill>
@@ -21352,7 +21352,7 @@
           <a:p>
             <a:pPr algn="l"/>
             <a:r>
-              <a:rPr sz="950" b="0">
+              <a:rPr sz="1250" b="0">
                 <a:solidFill>
                   <a:srgbClr val="4D4D4D"/>
                 </a:solidFill>
@@ -21368,7 +21368,7 @@
               </a:spcBef>
             </a:pPr>
             <a:r>
-              <a:rPr sz="950" b="0">
+              <a:rPr sz="1250" b="0">
                 <a:solidFill>
                   <a:srgbClr val="4D4D4D"/>
                 </a:solidFill>
@@ -21489,7 +21489,7 @@
           <a:p>
             <a:pPr algn="l"/>
             <a:r>
-              <a:rPr sz="1100" b="1" i="0">
+              <a:rPr sz="1400" b="1" i="0">
                 <a:solidFill>
                   <a:srgbClr val="007A87"/>
                 </a:solidFill>
@@ -21524,7 +21524,7 @@
           <a:p>
             <a:pPr algn="l"/>
             <a:r>
-              <a:rPr sz="950" b="0">
+              <a:rPr sz="1250" b="0">
                 <a:solidFill>
                   <a:srgbClr val="4D4D4D"/>
                 </a:solidFill>
@@ -21540,7 +21540,7 @@
               </a:spcBef>
             </a:pPr>
             <a:r>
-              <a:rPr sz="950" b="0">
+              <a:rPr sz="1250" b="0">
                 <a:solidFill>
                   <a:srgbClr val="4D4D4D"/>
                 </a:solidFill>
@@ -21661,7 +21661,7 @@
           <a:p>
             <a:pPr algn="l"/>
             <a:r>
-              <a:rPr sz="1100" b="1" i="0">
+              <a:rPr sz="1400" b="1" i="0">
                 <a:solidFill>
                   <a:srgbClr val="2D9C65"/>
                 </a:solidFill>
@@ -21696,7 +21696,7 @@
           <a:p>
             <a:pPr algn="l"/>
             <a:r>
-              <a:rPr sz="950" b="0">
+              <a:rPr sz="1250" b="0">
                 <a:solidFill>
                   <a:srgbClr val="4D4D4D"/>
                 </a:solidFill>
@@ -21712,7 +21712,7 @@
               </a:spcBef>
             </a:pPr>
             <a:r>
-              <a:rPr sz="950" b="0">
+              <a:rPr sz="1250" b="0">
                 <a:solidFill>
                   <a:srgbClr val="4D4D4D"/>
                 </a:solidFill>
